--- a/永活全能的神.pptx
+++ b/永活全能的神.pptx
@@ -167,7 +167,7 @@
           <a:lstStyle/>
           <a:p>
             <a:r>
-              <a:rPr lang="en-US" altLang="zh-TW" smtClean="0"/>
+              <a:rPr lang="en-US" altLang="zh-TW"/>
               <a:t>Click to edit Master title style</a:t>
             </a:r>
             <a:endParaRPr lang="zh-TW" altLang="en-US"/>
@@ -286,7 +286,7 @@
           </a:lstStyle>
           <a:p>
             <a:r>
-              <a:rPr lang="en-US" altLang="zh-TW" smtClean="0"/>
+              <a:rPr lang="en-US" altLang="zh-TW"/>
               <a:t>Click to edit Master subtitle style</a:t>
             </a:r>
             <a:endParaRPr lang="zh-TW" altLang="en-US"/>
@@ -310,7 +310,7 @@
           <a:p>
             <a:fld id="{F61F8BC4-83C0-4B5D-BD2F-556FD840B31E}" type="datetimeFigureOut">
               <a:rPr lang="en-US" smtClean="0"/>
-              <a:t>4/23/2022</a:t>
+              <a:t>4/25/2025</a:t>
             </a:fld>
             <a:endParaRPr lang="en-US"/>
           </a:p>
@@ -399,7 +399,7 @@
           <a:lstStyle/>
           <a:p>
             <a:r>
-              <a:rPr lang="en-US" altLang="zh-TW" smtClean="0"/>
+              <a:rPr lang="en-US" altLang="zh-TW"/>
               <a:t>Click to edit Master title style</a:t>
             </a:r>
             <a:endParaRPr lang="zh-TW" altLang="en-US"/>
@@ -423,35 +423,35 @@
           <a:p>
             <a:pPr lvl="0"/>
             <a:r>
-              <a:rPr lang="en-US" altLang="zh-TW" smtClean="0"/>
+              <a:rPr lang="en-US" altLang="zh-TW"/>
               <a:t>Click to edit Master text styles</a:t>
             </a:r>
           </a:p>
           <a:p>
             <a:pPr lvl="1"/>
             <a:r>
-              <a:rPr lang="en-US" altLang="zh-TW" smtClean="0"/>
+              <a:rPr lang="en-US" altLang="zh-TW"/>
               <a:t>Second level</a:t>
             </a:r>
           </a:p>
           <a:p>
             <a:pPr lvl="2"/>
             <a:r>
-              <a:rPr lang="en-US" altLang="zh-TW" smtClean="0"/>
+              <a:rPr lang="en-US" altLang="zh-TW"/>
               <a:t>Third level</a:t>
             </a:r>
           </a:p>
           <a:p>
             <a:pPr lvl="3"/>
             <a:r>
-              <a:rPr lang="en-US" altLang="zh-TW" smtClean="0"/>
+              <a:rPr lang="en-US" altLang="zh-TW"/>
               <a:t>Fourth level</a:t>
             </a:r>
           </a:p>
           <a:p>
             <a:pPr lvl="4"/>
             <a:r>
-              <a:rPr lang="en-US" altLang="zh-TW" smtClean="0"/>
+              <a:rPr lang="en-US" altLang="zh-TW"/>
               <a:t>Fifth level</a:t>
             </a:r>
             <a:endParaRPr lang="zh-TW" altLang="en-US"/>
@@ -475,7 +475,7 @@
           <a:p>
             <a:fld id="{F61F8BC4-83C0-4B5D-BD2F-556FD840B31E}" type="datetimeFigureOut">
               <a:rPr lang="en-US" smtClean="0"/>
-              <a:t>4/23/2022</a:t>
+              <a:t>4/25/2025</a:t>
             </a:fld>
             <a:endParaRPr lang="en-US"/>
           </a:p>
@@ -569,7 +569,7 @@
           <a:lstStyle/>
           <a:p>
             <a:r>
-              <a:rPr lang="en-US" altLang="zh-TW" smtClean="0"/>
+              <a:rPr lang="en-US" altLang="zh-TW"/>
               <a:t>Click to edit Master title style</a:t>
             </a:r>
             <a:endParaRPr lang="zh-TW" altLang="en-US"/>
@@ -598,35 +598,35 @@
           <a:p>
             <a:pPr lvl="0"/>
             <a:r>
-              <a:rPr lang="en-US" altLang="zh-TW" smtClean="0"/>
+              <a:rPr lang="en-US" altLang="zh-TW"/>
               <a:t>Click to edit Master text styles</a:t>
             </a:r>
           </a:p>
           <a:p>
             <a:pPr lvl="1"/>
             <a:r>
-              <a:rPr lang="en-US" altLang="zh-TW" smtClean="0"/>
+              <a:rPr lang="en-US" altLang="zh-TW"/>
               <a:t>Second level</a:t>
             </a:r>
           </a:p>
           <a:p>
             <a:pPr lvl="2"/>
             <a:r>
-              <a:rPr lang="en-US" altLang="zh-TW" smtClean="0"/>
+              <a:rPr lang="en-US" altLang="zh-TW"/>
               <a:t>Third level</a:t>
             </a:r>
           </a:p>
           <a:p>
             <a:pPr lvl="3"/>
             <a:r>
-              <a:rPr lang="en-US" altLang="zh-TW" smtClean="0"/>
+              <a:rPr lang="en-US" altLang="zh-TW"/>
               <a:t>Fourth level</a:t>
             </a:r>
           </a:p>
           <a:p>
             <a:pPr lvl="4"/>
             <a:r>
-              <a:rPr lang="en-US" altLang="zh-TW" smtClean="0"/>
+              <a:rPr lang="en-US" altLang="zh-TW"/>
               <a:t>Fifth level</a:t>
             </a:r>
             <a:endParaRPr lang="zh-TW" altLang="en-US"/>
@@ -650,7 +650,7 @@
           <a:p>
             <a:fld id="{F61F8BC4-83C0-4B5D-BD2F-556FD840B31E}" type="datetimeFigureOut">
               <a:rPr lang="en-US" smtClean="0"/>
-              <a:t>4/23/2022</a:t>
+              <a:t>4/25/2025</a:t>
             </a:fld>
             <a:endParaRPr lang="en-US"/>
           </a:p>
@@ -739,7 +739,7 @@
           <a:lstStyle/>
           <a:p>
             <a:r>
-              <a:rPr lang="en-US" altLang="zh-TW" smtClean="0"/>
+              <a:rPr lang="en-US" altLang="zh-TW"/>
               <a:t>Click to edit Master title style</a:t>
             </a:r>
             <a:endParaRPr lang="zh-TW" altLang="en-US"/>
@@ -763,35 +763,35 @@
           <a:p>
             <a:pPr lvl="0"/>
             <a:r>
-              <a:rPr lang="en-US" altLang="zh-TW" smtClean="0"/>
+              <a:rPr lang="en-US" altLang="zh-TW"/>
               <a:t>Click to edit Master text styles</a:t>
             </a:r>
           </a:p>
           <a:p>
             <a:pPr lvl="1"/>
             <a:r>
-              <a:rPr lang="en-US" altLang="zh-TW" smtClean="0"/>
+              <a:rPr lang="en-US" altLang="zh-TW"/>
               <a:t>Second level</a:t>
             </a:r>
           </a:p>
           <a:p>
             <a:pPr lvl="2"/>
             <a:r>
-              <a:rPr lang="en-US" altLang="zh-TW" smtClean="0"/>
+              <a:rPr lang="en-US" altLang="zh-TW"/>
               <a:t>Third level</a:t>
             </a:r>
           </a:p>
           <a:p>
             <a:pPr lvl="3"/>
             <a:r>
-              <a:rPr lang="en-US" altLang="zh-TW" smtClean="0"/>
+              <a:rPr lang="en-US" altLang="zh-TW"/>
               <a:t>Fourth level</a:t>
             </a:r>
           </a:p>
           <a:p>
             <a:pPr lvl="4"/>
             <a:r>
-              <a:rPr lang="en-US" altLang="zh-TW" smtClean="0"/>
+              <a:rPr lang="en-US" altLang="zh-TW"/>
               <a:t>Fifth level</a:t>
             </a:r>
             <a:endParaRPr lang="zh-TW" altLang="en-US"/>
@@ -815,7 +815,7 @@
           <a:p>
             <a:fld id="{F61F8BC4-83C0-4B5D-BD2F-556FD840B31E}" type="datetimeFigureOut">
               <a:rPr lang="en-US" smtClean="0"/>
-              <a:t>4/23/2022</a:t>
+              <a:t>4/25/2025</a:t>
             </a:fld>
             <a:endParaRPr lang="en-US"/>
           </a:p>
@@ -913,7 +913,7 @@
           </a:lstStyle>
           <a:p>
             <a:r>
-              <a:rPr lang="en-US" altLang="zh-TW" smtClean="0"/>
+              <a:rPr lang="en-US" altLang="zh-TW"/>
               <a:t>Click to edit Master title style</a:t>
             </a:r>
             <a:endParaRPr lang="zh-TW" altLang="en-US"/>
@@ -1033,7 +1033,7 @@
           <a:p>
             <a:pPr lvl="0"/>
             <a:r>
-              <a:rPr lang="en-US" altLang="zh-TW" smtClean="0"/>
+              <a:rPr lang="en-US" altLang="zh-TW"/>
               <a:t>Click to edit Master text styles</a:t>
             </a:r>
           </a:p>
@@ -1056,7 +1056,7 @@
           <a:p>
             <a:fld id="{F61F8BC4-83C0-4B5D-BD2F-556FD840B31E}" type="datetimeFigureOut">
               <a:rPr lang="en-US" smtClean="0"/>
-              <a:t>4/23/2022</a:t>
+              <a:t>4/25/2025</a:t>
             </a:fld>
             <a:endParaRPr lang="en-US"/>
           </a:p>
@@ -1145,7 +1145,7 @@
           <a:lstStyle/>
           <a:p>
             <a:r>
-              <a:rPr lang="en-US" altLang="zh-TW" smtClean="0"/>
+              <a:rPr lang="en-US" altLang="zh-TW"/>
               <a:t>Click to edit Master title style</a:t>
             </a:r>
             <a:endParaRPr lang="zh-TW" altLang="en-US"/>
@@ -1202,35 +1202,35 @@
           <a:p>
             <a:pPr lvl="0"/>
             <a:r>
-              <a:rPr lang="en-US" altLang="zh-TW" smtClean="0"/>
+              <a:rPr lang="en-US" altLang="zh-TW"/>
               <a:t>Click to edit Master text styles</a:t>
             </a:r>
           </a:p>
           <a:p>
             <a:pPr lvl="1"/>
             <a:r>
-              <a:rPr lang="en-US" altLang="zh-TW" smtClean="0"/>
+              <a:rPr lang="en-US" altLang="zh-TW"/>
               <a:t>Second level</a:t>
             </a:r>
           </a:p>
           <a:p>
             <a:pPr lvl="2"/>
             <a:r>
-              <a:rPr lang="en-US" altLang="zh-TW" smtClean="0"/>
+              <a:rPr lang="en-US" altLang="zh-TW"/>
               <a:t>Third level</a:t>
             </a:r>
           </a:p>
           <a:p>
             <a:pPr lvl="3"/>
             <a:r>
-              <a:rPr lang="en-US" altLang="zh-TW" smtClean="0"/>
+              <a:rPr lang="en-US" altLang="zh-TW"/>
               <a:t>Fourth level</a:t>
             </a:r>
           </a:p>
           <a:p>
             <a:pPr lvl="4"/>
             <a:r>
-              <a:rPr lang="en-US" altLang="zh-TW" smtClean="0"/>
+              <a:rPr lang="en-US" altLang="zh-TW"/>
               <a:t>Fifth level</a:t>
             </a:r>
             <a:endParaRPr lang="zh-TW" altLang="en-US"/>
@@ -1287,35 +1287,35 @@
           <a:p>
             <a:pPr lvl="0"/>
             <a:r>
-              <a:rPr lang="en-US" altLang="zh-TW" smtClean="0"/>
+              <a:rPr lang="en-US" altLang="zh-TW"/>
               <a:t>Click to edit Master text styles</a:t>
             </a:r>
           </a:p>
           <a:p>
             <a:pPr lvl="1"/>
             <a:r>
-              <a:rPr lang="en-US" altLang="zh-TW" smtClean="0"/>
+              <a:rPr lang="en-US" altLang="zh-TW"/>
               <a:t>Second level</a:t>
             </a:r>
           </a:p>
           <a:p>
             <a:pPr lvl="2"/>
             <a:r>
-              <a:rPr lang="en-US" altLang="zh-TW" smtClean="0"/>
+              <a:rPr lang="en-US" altLang="zh-TW"/>
               <a:t>Third level</a:t>
             </a:r>
           </a:p>
           <a:p>
             <a:pPr lvl="3"/>
             <a:r>
-              <a:rPr lang="en-US" altLang="zh-TW" smtClean="0"/>
+              <a:rPr lang="en-US" altLang="zh-TW"/>
               <a:t>Fourth level</a:t>
             </a:r>
           </a:p>
           <a:p>
             <a:pPr lvl="4"/>
             <a:r>
-              <a:rPr lang="en-US" altLang="zh-TW" smtClean="0"/>
+              <a:rPr lang="en-US" altLang="zh-TW"/>
               <a:t>Fifth level</a:t>
             </a:r>
             <a:endParaRPr lang="zh-TW" altLang="en-US"/>
@@ -1339,7 +1339,7 @@
           <a:p>
             <a:fld id="{F61F8BC4-83C0-4B5D-BD2F-556FD840B31E}" type="datetimeFigureOut">
               <a:rPr lang="en-US" smtClean="0"/>
-              <a:t>4/23/2022</a:t>
+              <a:t>4/25/2025</a:t>
             </a:fld>
             <a:endParaRPr lang="en-US"/>
           </a:p>
@@ -1432,7 +1432,7 @@
           </a:lstStyle>
           <a:p>
             <a:r>
-              <a:rPr lang="en-US" altLang="zh-TW" smtClean="0"/>
+              <a:rPr lang="en-US" altLang="zh-TW"/>
               <a:t>Click to edit Master title style</a:t>
             </a:r>
             <a:endParaRPr lang="zh-TW" altLang="en-US"/>
@@ -1498,7 +1498,7 @@
           <a:p>
             <a:pPr lvl="0"/>
             <a:r>
-              <a:rPr lang="en-US" altLang="zh-TW" smtClean="0"/>
+              <a:rPr lang="en-US" altLang="zh-TW"/>
               <a:t>Click to edit Master text styles</a:t>
             </a:r>
           </a:p>
@@ -1554,35 +1554,35 @@
           <a:p>
             <a:pPr lvl="0"/>
             <a:r>
-              <a:rPr lang="en-US" altLang="zh-TW" smtClean="0"/>
+              <a:rPr lang="en-US" altLang="zh-TW"/>
               <a:t>Click to edit Master text styles</a:t>
             </a:r>
           </a:p>
           <a:p>
             <a:pPr lvl="1"/>
             <a:r>
-              <a:rPr lang="en-US" altLang="zh-TW" smtClean="0"/>
+              <a:rPr lang="en-US" altLang="zh-TW"/>
               <a:t>Second level</a:t>
             </a:r>
           </a:p>
           <a:p>
             <a:pPr lvl="2"/>
             <a:r>
-              <a:rPr lang="en-US" altLang="zh-TW" smtClean="0"/>
+              <a:rPr lang="en-US" altLang="zh-TW"/>
               <a:t>Third level</a:t>
             </a:r>
           </a:p>
           <a:p>
             <a:pPr lvl="3"/>
             <a:r>
-              <a:rPr lang="en-US" altLang="zh-TW" smtClean="0"/>
+              <a:rPr lang="en-US" altLang="zh-TW"/>
               <a:t>Fourth level</a:t>
             </a:r>
           </a:p>
           <a:p>
             <a:pPr lvl="4"/>
             <a:r>
-              <a:rPr lang="en-US" altLang="zh-TW" smtClean="0"/>
+              <a:rPr lang="en-US" altLang="zh-TW"/>
               <a:t>Fifth level</a:t>
             </a:r>
             <a:endParaRPr lang="zh-TW" altLang="en-US"/>
@@ -1648,7 +1648,7 @@
           <a:p>
             <a:pPr lvl="0"/>
             <a:r>
-              <a:rPr lang="en-US" altLang="zh-TW" smtClean="0"/>
+              <a:rPr lang="en-US" altLang="zh-TW"/>
               <a:t>Click to edit Master text styles</a:t>
             </a:r>
           </a:p>
@@ -1704,35 +1704,35 @@
           <a:p>
             <a:pPr lvl="0"/>
             <a:r>
-              <a:rPr lang="en-US" altLang="zh-TW" smtClean="0"/>
+              <a:rPr lang="en-US" altLang="zh-TW"/>
               <a:t>Click to edit Master text styles</a:t>
             </a:r>
           </a:p>
           <a:p>
             <a:pPr lvl="1"/>
             <a:r>
-              <a:rPr lang="en-US" altLang="zh-TW" smtClean="0"/>
+              <a:rPr lang="en-US" altLang="zh-TW"/>
               <a:t>Second level</a:t>
             </a:r>
           </a:p>
           <a:p>
             <a:pPr lvl="2"/>
             <a:r>
-              <a:rPr lang="en-US" altLang="zh-TW" smtClean="0"/>
+              <a:rPr lang="en-US" altLang="zh-TW"/>
               <a:t>Third level</a:t>
             </a:r>
           </a:p>
           <a:p>
             <a:pPr lvl="3"/>
             <a:r>
-              <a:rPr lang="en-US" altLang="zh-TW" smtClean="0"/>
+              <a:rPr lang="en-US" altLang="zh-TW"/>
               <a:t>Fourth level</a:t>
             </a:r>
           </a:p>
           <a:p>
             <a:pPr lvl="4"/>
             <a:r>
-              <a:rPr lang="en-US" altLang="zh-TW" smtClean="0"/>
+              <a:rPr lang="en-US" altLang="zh-TW"/>
               <a:t>Fifth level</a:t>
             </a:r>
             <a:endParaRPr lang="zh-TW" altLang="en-US"/>
@@ -1756,7 +1756,7 @@
           <a:p>
             <a:fld id="{F61F8BC4-83C0-4B5D-BD2F-556FD840B31E}" type="datetimeFigureOut">
               <a:rPr lang="en-US" smtClean="0"/>
-              <a:t>4/23/2022</a:t>
+              <a:t>4/25/2025</a:t>
             </a:fld>
             <a:endParaRPr lang="en-US"/>
           </a:p>
@@ -1845,7 +1845,7 @@
           <a:lstStyle/>
           <a:p>
             <a:r>
-              <a:rPr lang="en-US" altLang="zh-TW" smtClean="0"/>
+              <a:rPr lang="en-US" altLang="zh-TW"/>
               <a:t>Click to edit Master title style</a:t>
             </a:r>
             <a:endParaRPr lang="zh-TW" altLang="en-US"/>
@@ -1869,7 +1869,7 @@
           <a:p>
             <a:fld id="{F61F8BC4-83C0-4B5D-BD2F-556FD840B31E}" type="datetimeFigureOut">
               <a:rPr lang="en-US" smtClean="0"/>
-              <a:t>4/23/2022</a:t>
+              <a:t>4/25/2025</a:t>
             </a:fld>
             <a:endParaRPr lang="en-US"/>
           </a:p>
@@ -1959,7 +1959,7 @@
           <a:p>
             <a:fld id="{F61F8BC4-83C0-4B5D-BD2F-556FD840B31E}" type="datetimeFigureOut">
               <a:rPr lang="en-US" smtClean="0"/>
-              <a:t>4/23/2022</a:t>
+              <a:t>4/25/2025</a:t>
             </a:fld>
             <a:endParaRPr lang="en-US"/>
           </a:p>
@@ -2057,7 +2057,7 @@
           </a:lstStyle>
           <a:p>
             <a:r>
-              <a:rPr lang="en-US" altLang="zh-TW" smtClean="0"/>
+              <a:rPr lang="en-US" altLang="zh-TW"/>
               <a:t>Click to edit Master title style</a:t>
             </a:r>
             <a:endParaRPr lang="zh-TW" altLang="en-US"/>
@@ -2114,35 +2114,35 @@
           <a:p>
             <a:pPr lvl="0"/>
             <a:r>
-              <a:rPr lang="en-US" altLang="zh-TW" smtClean="0"/>
+              <a:rPr lang="en-US" altLang="zh-TW"/>
               <a:t>Click to edit Master text styles</a:t>
             </a:r>
           </a:p>
           <a:p>
             <a:pPr lvl="1"/>
             <a:r>
-              <a:rPr lang="en-US" altLang="zh-TW" smtClean="0"/>
+              <a:rPr lang="en-US" altLang="zh-TW"/>
               <a:t>Second level</a:t>
             </a:r>
           </a:p>
           <a:p>
             <a:pPr lvl="2"/>
             <a:r>
-              <a:rPr lang="en-US" altLang="zh-TW" smtClean="0"/>
+              <a:rPr lang="en-US" altLang="zh-TW"/>
               <a:t>Third level</a:t>
             </a:r>
           </a:p>
           <a:p>
             <a:pPr lvl="3"/>
             <a:r>
-              <a:rPr lang="en-US" altLang="zh-TW" smtClean="0"/>
+              <a:rPr lang="en-US" altLang="zh-TW"/>
               <a:t>Fourth level</a:t>
             </a:r>
           </a:p>
           <a:p>
             <a:pPr lvl="4"/>
             <a:r>
-              <a:rPr lang="en-US" altLang="zh-TW" smtClean="0"/>
+              <a:rPr lang="en-US" altLang="zh-TW"/>
               <a:t>Fifth level</a:t>
             </a:r>
             <a:endParaRPr lang="zh-TW" altLang="en-US"/>
@@ -2208,7 +2208,7 @@
           <a:p>
             <a:pPr lvl="0"/>
             <a:r>
-              <a:rPr lang="en-US" altLang="zh-TW" smtClean="0"/>
+              <a:rPr lang="en-US" altLang="zh-TW"/>
               <a:t>Click to edit Master text styles</a:t>
             </a:r>
           </a:p>
@@ -2231,7 +2231,7 @@
           <a:p>
             <a:fld id="{F61F8BC4-83C0-4B5D-BD2F-556FD840B31E}" type="datetimeFigureOut">
               <a:rPr lang="en-US" smtClean="0"/>
-              <a:t>4/23/2022</a:t>
+              <a:t>4/25/2025</a:t>
             </a:fld>
             <a:endParaRPr lang="en-US"/>
           </a:p>
@@ -2329,7 +2329,7 @@
           </a:lstStyle>
           <a:p>
             <a:r>
-              <a:rPr lang="en-US" altLang="zh-TW" smtClean="0"/>
+              <a:rPr lang="en-US" altLang="zh-TW"/>
               <a:t>Click to edit Master title style</a:t>
             </a:r>
             <a:endParaRPr lang="zh-TW" altLang="en-US"/>
@@ -2394,7 +2394,7 @@
           </a:lstStyle>
           <a:p>
             <a:r>
-              <a:rPr lang="en-US" altLang="zh-TW" smtClean="0"/>
+              <a:rPr lang="en-US" altLang="zh-TW"/>
               <a:t>Click icon to add picture</a:t>
             </a:r>
             <a:endParaRPr lang="zh-TW" altLang="en-US"/>
@@ -2460,7 +2460,7 @@
           <a:p>
             <a:pPr lvl="0"/>
             <a:r>
-              <a:rPr lang="en-US" altLang="zh-TW" smtClean="0"/>
+              <a:rPr lang="en-US" altLang="zh-TW"/>
               <a:t>Click to edit Master text styles</a:t>
             </a:r>
           </a:p>
@@ -2483,7 +2483,7 @@
           <a:p>
             <a:fld id="{F61F8BC4-83C0-4B5D-BD2F-556FD840B31E}" type="datetimeFigureOut">
               <a:rPr lang="en-US" smtClean="0"/>
-              <a:t>4/23/2022</a:t>
+              <a:t>4/25/2025</a:t>
             </a:fld>
             <a:endParaRPr lang="en-US"/>
           </a:p>
@@ -2592,10 +2592,9 @@
           <a:lstStyle/>
           <a:p>
             <a:r>
-              <a:rPr lang="zh-TW" altLang="en-US" smtClean="0"/>
+              <a:rPr lang="zh-TW" altLang="en-US"/>
               <a:t>按一下以編輯母片標題樣式</a:t>
             </a:r>
-            <a:endParaRPr lang="zh-TW" altLang="en-US"/>
           </a:p>
         </p:txBody>
       </p:sp>
@@ -2626,38 +2625,37 @@
           <a:p>
             <a:pPr lvl="0"/>
             <a:r>
-              <a:rPr lang="zh-TW" altLang="en-US" smtClean="0"/>
+              <a:rPr lang="zh-TW" altLang="en-US"/>
               <a:t>按一下以編輯母片文字樣式</a:t>
             </a:r>
           </a:p>
           <a:p>
             <a:pPr lvl="1"/>
             <a:r>
-              <a:rPr lang="zh-TW" altLang="en-US" smtClean="0"/>
+              <a:rPr lang="zh-TW" altLang="en-US"/>
               <a:t>第二層</a:t>
             </a:r>
           </a:p>
           <a:p>
             <a:pPr lvl="2"/>
             <a:r>
-              <a:rPr lang="zh-TW" altLang="en-US" smtClean="0"/>
+              <a:rPr lang="zh-TW" altLang="en-US"/>
               <a:t>第三層</a:t>
             </a:r>
           </a:p>
           <a:p>
             <a:pPr lvl="3"/>
             <a:r>
-              <a:rPr lang="zh-TW" altLang="en-US" smtClean="0"/>
+              <a:rPr lang="zh-TW" altLang="en-US"/>
               <a:t>第四層</a:t>
             </a:r>
           </a:p>
           <a:p>
             <a:pPr lvl="4"/>
             <a:r>
-              <a:rPr lang="zh-TW" altLang="en-US" smtClean="0"/>
+              <a:rPr lang="zh-TW" altLang="en-US"/>
               <a:t>第五層</a:t>
             </a:r>
-            <a:endParaRPr lang="zh-TW" altLang="en-US"/>
           </a:p>
         </p:txBody>
       </p:sp>
@@ -2696,7 +2694,7 @@
           <a:p>
             <a:fld id="{F61F8BC4-83C0-4B5D-BD2F-556FD840B31E}" type="datetimeFigureOut">
               <a:rPr lang="en-US" smtClean="0"/>
-              <a:t>4/23/2022</a:t>
+              <a:t>4/25/2025</a:t>
             </a:fld>
             <a:endParaRPr lang="en-US"/>
           </a:p>
@@ -3103,24 +3101,7 @@
                 <a:latin typeface="微軟正黑體" pitchFamily="34" charset="-120"/>
                 <a:ea typeface="微軟正黑體" pitchFamily="34" charset="-120"/>
               </a:rPr>
-              <a:t>永</a:t>
-            </a:r>
-            <a:r>
-              <a:rPr lang="zh-CN" altLang="en-US" sz="7200" b="1" i="1" dirty="0">
-                <a:solidFill>
-                  <a:srgbClr val="660033"/>
-                </a:solidFill>
-                <a:effectLst>
-                  <a:outerShdw blurRad="38100" dist="38100" dir="2700000" algn="tl">
-                    <a:srgbClr val="000000">
-                      <a:alpha val="43137"/>
-                    </a:srgbClr>
-                  </a:outerShdw>
-                </a:effectLst>
-                <a:latin typeface="微軟正黑體" pitchFamily="34" charset="-120"/>
-                <a:ea typeface="微軟正黑體" pitchFamily="34" charset="-120"/>
-              </a:rPr>
-              <a:t>活全能的神</a:t>
+              <a:t>永活全能的神</a:t>
             </a:r>
             <a:endParaRPr lang="zh-TW" altLang="en-US" sz="7200" b="1" i="1" dirty="0">
               <a:solidFill>
@@ -3212,17 +3193,7 @@
                 <a:latin typeface="微軟正黑體" pitchFamily="34" charset="-120"/>
                 <a:ea typeface="微軟正黑體" pitchFamily="34" charset="-120"/>
               </a:rPr>
-              <a:t>已</a:t>
-            </a:r>
-            <a:r>
-              <a:rPr lang="zh-TW" altLang="en-US" sz="6400" b="1" dirty="0">
-                <a:solidFill>
-                  <a:srgbClr val="660033"/>
-                </a:solidFill>
-                <a:latin typeface="微軟正黑體" pitchFamily="34" charset="-120"/>
-                <a:ea typeface="微軟正黑體" pitchFamily="34" charset="-120"/>
-              </a:rPr>
-              <a:t>勝過黑暗權勢 </a:t>
+              <a:t>已勝過黑暗權勢 </a:t>
             </a:r>
             <a:endParaRPr lang="en-US" altLang="zh-TW" sz="6400" b="1" dirty="0">
               <a:solidFill>
@@ -3254,17 +3225,7 @@
                 <a:latin typeface="微軟正黑體" pitchFamily="34" charset="-120"/>
                 <a:ea typeface="微軟正黑體" pitchFamily="34" charset="-120"/>
               </a:rPr>
-              <a:t>已</a:t>
-            </a:r>
-            <a:r>
-              <a:rPr lang="zh-TW" altLang="en-US" sz="6400" b="1" dirty="0">
-                <a:solidFill>
-                  <a:srgbClr val="660033"/>
-                </a:solidFill>
-                <a:latin typeface="微軟正黑體" pitchFamily="34" charset="-120"/>
-                <a:ea typeface="微軟正黑體" pitchFamily="34" charset="-120"/>
-              </a:rPr>
-              <a:t>超乎天下萬有</a:t>
+              <a:t>已超乎天下萬有</a:t>
             </a:r>
             <a:endParaRPr lang="en-US" altLang="zh-TW" sz="6400" b="1" dirty="0">
               <a:solidFill>
@@ -3317,7 +3278,7 @@
                 <a:latin typeface="Microsoft JhengHei" panose="020B0604030504040204" pitchFamily="34" charset="-120"/>
                 <a:ea typeface="Microsoft JhengHei" panose="020B0604030504040204" pitchFamily="34" charset="-120"/>
               </a:rPr>
-              <a:t>正</a:t>
+              <a:t>正歌</a:t>
             </a:r>
             <a:r>
               <a:rPr lang="en-US" sz="4267" b="1" dirty="0">
@@ -3411,17 +3372,7 @@
                 <a:latin typeface="微軟正黑體" pitchFamily="34" charset="-120"/>
                 <a:ea typeface="微軟正黑體" pitchFamily="34" charset="-120"/>
               </a:rPr>
-              <a:t>是</a:t>
-            </a:r>
-            <a:r>
-              <a:rPr lang="zh-TW" altLang="en-US" sz="6400" b="1" dirty="0">
-                <a:solidFill>
-                  <a:srgbClr val="660033"/>
-                </a:solidFill>
-                <a:latin typeface="微軟正黑體" pitchFamily="34" charset="-120"/>
-                <a:ea typeface="微軟正黑體" pitchFamily="34" charset="-120"/>
-              </a:rPr>
-              <a:t>永活全能的神</a:t>
+              <a:t>是永活全能的神</a:t>
             </a:r>
             <a:endParaRPr lang="en-US" altLang="zh-TW" sz="6400" b="1" dirty="0">
               <a:solidFill>
@@ -3474,7 +3425,7 @@
                 <a:latin typeface="Microsoft JhengHei" panose="020B0604030504040204" pitchFamily="34" charset="-120"/>
                 <a:ea typeface="Microsoft JhengHei" panose="020B0604030504040204" pitchFamily="34" charset="-120"/>
               </a:rPr>
-              <a:t>正</a:t>
+              <a:t>正歌</a:t>
             </a:r>
             <a:r>
               <a:rPr lang="en-US" sz="4267" b="1" dirty="0">
@@ -3568,17 +3519,7 @@
                 <a:latin typeface="微軟正黑體" pitchFamily="34" charset="-120"/>
                 <a:ea typeface="微軟正黑體" pitchFamily="34" charset="-120"/>
               </a:rPr>
-              <a:t>的</a:t>
-            </a:r>
-            <a:r>
-              <a:rPr lang="zh-TW" altLang="en-US" sz="6400" b="1" dirty="0">
-                <a:solidFill>
-                  <a:srgbClr val="660033"/>
-                </a:solidFill>
-                <a:latin typeface="微軟正黑體" pitchFamily="34" charset="-120"/>
-                <a:ea typeface="微軟正黑體" pitchFamily="34" charset="-120"/>
-              </a:rPr>
-              <a:t>名要稱為至高 </a:t>
+              <a:t>的名要稱為至高 </a:t>
             </a:r>
             <a:endParaRPr lang="en-US" altLang="zh-TW" sz="6400" b="1" dirty="0">
               <a:solidFill>
@@ -3610,17 +3551,7 @@
                 <a:latin typeface="微軟正黑體" pitchFamily="34" charset="-120"/>
                 <a:ea typeface="微軟正黑體" pitchFamily="34" charset="-120"/>
               </a:rPr>
-              <a:t>的</a:t>
-            </a:r>
-            <a:r>
-              <a:rPr lang="zh-TW" altLang="en-US" sz="6400" b="1" dirty="0">
-                <a:solidFill>
-                  <a:srgbClr val="660033"/>
-                </a:solidFill>
-                <a:latin typeface="微軟正黑體" pitchFamily="34" charset="-120"/>
-                <a:ea typeface="微軟正黑體" pitchFamily="34" charset="-120"/>
-              </a:rPr>
-              <a:t>國度滿有榮耀 </a:t>
+              <a:t>的國度滿有榮耀 </a:t>
             </a:r>
             <a:endParaRPr lang="en-US" altLang="zh-TW" sz="6400" b="1" dirty="0">
               <a:solidFill>
@@ -3673,7 +3604,7 @@
                 <a:latin typeface="Microsoft JhengHei" panose="020B0604030504040204" pitchFamily="34" charset="-120"/>
                 <a:ea typeface="Microsoft JhengHei" panose="020B0604030504040204" pitchFamily="34" charset="-120"/>
               </a:rPr>
-              <a:t>正</a:t>
+              <a:t>正歌</a:t>
             </a:r>
             <a:r>
               <a:rPr lang="en-US" sz="4267" b="1" dirty="0">
@@ -3767,17 +3698,7 @@
                 <a:latin typeface="微軟正黑體" pitchFamily="34" charset="-120"/>
                 <a:ea typeface="微軟正黑體" pitchFamily="34" charset="-120"/>
               </a:rPr>
-              <a:t>是</a:t>
-            </a:r>
-            <a:r>
-              <a:rPr lang="zh-TW" altLang="en-US" sz="6400" b="1" dirty="0">
-                <a:solidFill>
-                  <a:srgbClr val="660033"/>
-                </a:solidFill>
-                <a:latin typeface="微軟正黑體" pitchFamily="34" charset="-120"/>
-                <a:ea typeface="微軟正黑體" pitchFamily="34" charset="-120"/>
-              </a:rPr>
-              <a:t>永活全能的神</a:t>
+              <a:t>是永活全能的神</a:t>
             </a:r>
             <a:endParaRPr lang="en-US" altLang="zh-TW" sz="6400" b="1" dirty="0">
               <a:solidFill>
@@ -3830,7 +3751,7 @@
                 <a:latin typeface="Microsoft JhengHei" panose="020B0604030504040204" pitchFamily="34" charset="-120"/>
                 <a:ea typeface="Microsoft JhengHei" panose="020B0604030504040204" pitchFamily="34" charset="-120"/>
               </a:rPr>
-              <a:t>正</a:t>
+              <a:t>正歌</a:t>
             </a:r>
             <a:r>
               <a:rPr lang="en-US" sz="4267" b="1" dirty="0">
@@ -3914,17 +3835,7 @@
                 <a:latin typeface="微軟正黑體" pitchFamily="34" charset="-120"/>
                 <a:ea typeface="微軟正黑體" pitchFamily="34" charset="-120"/>
               </a:rPr>
-              <a:t>哈利路亞 </a:t>
-            </a:r>
-            <a:r>
-              <a:rPr lang="zh-TW" altLang="en-US" sz="6400" b="1" dirty="0">
-                <a:solidFill>
-                  <a:srgbClr val="660033"/>
-                </a:solidFill>
-                <a:latin typeface="微軟正黑體" pitchFamily="34" charset="-120"/>
-                <a:ea typeface="微軟正黑體" pitchFamily="34" charset="-120"/>
-              </a:rPr>
-              <a:t>  </a:t>
+              <a:t>哈利路亞   </a:t>
             </a:r>
             <a:r>
               <a:rPr lang="zh-CN" altLang="en-US" sz="6400" b="1" dirty="0">
@@ -3944,17 +3855,7 @@
                 <a:latin typeface="微軟正黑體" pitchFamily="34" charset="-120"/>
                 <a:ea typeface="微軟正黑體" pitchFamily="34" charset="-120"/>
               </a:rPr>
-              <a:t>已</a:t>
-            </a:r>
-            <a:r>
-              <a:rPr lang="zh-TW" altLang="en-US" sz="6400" b="1" dirty="0">
-                <a:solidFill>
-                  <a:srgbClr val="660033"/>
-                </a:solidFill>
-                <a:latin typeface="微軟正黑體" pitchFamily="34" charset="-120"/>
-                <a:ea typeface="微軟正黑體" pitchFamily="34" charset="-120"/>
-              </a:rPr>
-              <a:t>復活 </a:t>
+              <a:t>已復活 </a:t>
             </a:r>
             <a:endParaRPr lang="en-US" altLang="zh-TW" sz="6400" b="1" dirty="0">
               <a:solidFill>
@@ -3976,17 +3877,7 @@
                 <a:latin typeface="微軟正黑體" pitchFamily="34" charset="-120"/>
                 <a:ea typeface="微軟正黑體" pitchFamily="34" charset="-120"/>
               </a:rPr>
-              <a:t>哈利路</a:t>
-            </a:r>
-            <a:r>
-              <a:rPr lang="zh-TW" altLang="en-US" sz="6400" b="1" dirty="0">
-                <a:solidFill>
-                  <a:srgbClr val="660033"/>
-                </a:solidFill>
-                <a:latin typeface="微軟正黑體" pitchFamily="34" charset="-120"/>
-                <a:ea typeface="微軟正黑體" pitchFamily="34" charset="-120"/>
-              </a:rPr>
-              <a:t>亞   </a:t>
+              <a:t>哈利路亞   </a:t>
             </a:r>
             <a:r>
               <a:rPr lang="zh-CN" altLang="en-US" sz="6400" b="1" dirty="0">
@@ -4006,17 +3897,7 @@
                 <a:latin typeface="微軟正黑體" pitchFamily="34" charset="-120"/>
                 <a:ea typeface="微軟正黑體" pitchFamily="34" charset="-120"/>
               </a:rPr>
-              <a:t>已</a:t>
-            </a:r>
-            <a:r>
-              <a:rPr lang="zh-TW" altLang="en-US" sz="6400" b="1" dirty="0">
-                <a:solidFill>
-                  <a:srgbClr val="660033"/>
-                </a:solidFill>
-                <a:latin typeface="微軟正黑體" pitchFamily="34" charset="-120"/>
-                <a:ea typeface="微軟正黑體" pitchFamily="34" charset="-120"/>
-              </a:rPr>
-              <a:t>得勝</a:t>
+              <a:t>已得勝</a:t>
             </a:r>
             <a:endParaRPr lang="en-US" altLang="zh-TW" sz="6400" b="1" dirty="0">
               <a:solidFill>
@@ -4069,7 +3950,7 @@
                 <a:latin typeface="Microsoft JhengHei" panose="020B0604030504040204" pitchFamily="34" charset="-120"/>
                 <a:ea typeface="Microsoft JhengHei" panose="020B0604030504040204" pitchFamily="34" charset="-120"/>
               </a:rPr>
-              <a:t>副</a:t>
+              <a:t>副歌</a:t>
             </a:r>
             <a:r>
               <a:rPr lang="en-US" sz="4267" b="1" dirty="0">
@@ -4163,17 +4044,7 @@
                 <a:latin typeface="微軟正黑體" pitchFamily="34" charset="-120"/>
                 <a:ea typeface="微軟正黑體" pitchFamily="34" charset="-120"/>
               </a:rPr>
-              <a:t>是</a:t>
-            </a:r>
-            <a:r>
-              <a:rPr lang="zh-TW" altLang="en-US" sz="6400" b="1" dirty="0">
-                <a:solidFill>
-                  <a:srgbClr val="660033"/>
-                </a:solidFill>
-                <a:latin typeface="微軟正黑體" pitchFamily="34" charset="-120"/>
-                <a:ea typeface="微軟正黑體" pitchFamily="34" charset="-120"/>
-              </a:rPr>
-              <a:t>天上地下萬王之王 </a:t>
+              <a:t>是天上地下萬王之王 </a:t>
             </a:r>
             <a:endParaRPr lang="en-US" altLang="zh-TW" sz="6400" b="1" dirty="0">
               <a:solidFill>
@@ -4205,17 +4076,7 @@
                 <a:latin typeface="微軟正黑體" pitchFamily="34" charset="-120"/>
                 <a:ea typeface="微軟正黑體" pitchFamily="34" charset="-120"/>
               </a:rPr>
-              <a:t>是</a:t>
-            </a:r>
-            <a:r>
-              <a:rPr lang="zh-TW" altLang="en-US" sz="6400" b="1" dirty="0">
-                <a:solidFill>
-                  <a:srgbClr val="660033"/>
-                </a:solidFill>
-                <a:latin typeface="微軟正黑體" pitchFamily="34" charset="-120"/>
-                <a:ea typeface="微軟正黑體" pitchFamily="34" charset="-120"/>
-              </a:rPr>
-              <a:t>永活全能的神</a:t>
+              <a:t>是永活全能的神</a:t>
             </a:r>
             <a:endParaRPr lang="en-US" altLang="zh-TW" sz="6400" b="1" dirty="0">
               <a:solidFill>
@@ -4268,7 +4129,7 @@
                 <a:latin typeface="Microsoft JhengHei" panose="020B0604030504040204" pitchFamily="34" charset="-120"/>
                 <a:ea typeface="Microsoft JhengHei" panose="020B0604030504040204" pitchFamily="34" charset="-120"/>
               </a:rPr>
-              <a:t>副</a:t>
+              <a:t>副歌</a:t>
             </a:r>
             <a:r>
               <a:rPr lang="en-US" sz="4267" b="1" dirty="0">
@@ -4278,7 +4139,46 @@
                 <a:latin typeface="Microsoft JhengHei" panose="020B0604030504040204" pitchFamily="34" charset="-120"/>
                 <a:ea typeface="Microsoft JhengHei" panose="020B0604030504040204" pitchFamily="34" charset="-120"/>
               </a:rPr>
-              <a:t> )( x2 )</a:t>
+              <a:t> )</a:t>
+            </a:r>
+            <a:r>
+              <a:rPr lang="zh-CN" altLang="en-US" sz="4267" b="1">
+                <a:solidFill>
+                  <a:srgbClr val="660033"/>
+                </a:solidFill>
+                <a:ea typeface="Microsoft JhengHei" panose="020B0604030504040204" pitchFamily="34" charset="-120"/>
+              </a:rPr>
+              <a:t>（</a:t>
+            </a:r>
+            <a:r>
+              <a:rPr lang="en-US" sz="4267" b="1">
+                <a:solidFill>
+                  <a:srgbClr val="660033"/>
+                </a:solidFill>
+                <a:latin typeface="Microsoft JhengHei" panose="020B0604030504040204" pitchFamily="34" charset="-120"/>
+                <a:ea typeface="Microsoft JhengHei" panose="020B0604030504040204" pitchFamily="34" charset="-120"/>
+              </a:rPr>
+              <a:t>2</a:t>
+            </a:r>
+            <a:r>
+              <a:rPr lang="zh-CN" altLang="en-US" sz="4267" b="1" dirty="0">
+                <a:solidFill>
+                  <a:srgbClr val="660033"/>
+                </a:solidFill>
+                <a:latin typeface="Microsoft JhengHei" panose="020B0604030504040204" pitchFamily="34" charset="-120"/>
+                <a:ea typeface="Microsoft JhengHei" panose="020B0604030504040204" pitchFamily="34" charset="-120"/>
+              </a:rPr>
+              <a:t>次</a:t>
+            </a:r>
+            <a:r>
+              <a:rPr lang="en-US" sz="4267" b="1" dirty="0">
+                <a:solidFill>
+                  <a:srgbClr val="660033"/>
+                </a:solidFill>
+                <a:latin typeface="Microsoft JhengHei" panose="020B0604030504040204" pitchFamily="34" charset="-120"/>
+                <a:ea typeface="Microsoft JhengHei" panose="020B0604030504040204" pitchFamily="34" charset="-120"/>
+              </a:rPr>
+              <a:t> )</a:t>
             </a:r>
             <a:endParaRPr lang="vi-VN" sz="4267" b="1" dirty="0">
               <a:solidFill>
